--- a/p01/VR-A-Frame-introduction.pptx
+++ b/p01/VR-A-Frame-introduction.pptx
@@ -3287,7 +3287,7 @@
           <a:p>
             <a:fld id="{846CE7D5-CF57-46EF-B807-FDD0502418D4}" type="datetimeFigureOut">
               <a:rPr lang="en-US" smtClean="0"/>
-              <a:t>1/6/2026</a:t>
+              <a:t>5/20/2026</a:t>
             </a:fld>
             <a:endParaRPr lang="en-US"/>
           </a:p>
@@ -3457,7 +3457,7 @@
           <a:p>
             <a:fld id="{846CE7D5-CF57-46EF-B807-FDD0502418D4}" type="datetimeFigureOut">
               <a:rPr lang="en-US" smtClean="0"/>
-              <a:t>1/6/2026</a:t>
+              <a:t>5/20/2026</a:t>
             </a:fld>
             <a:endParaRPr lang="en-US"/>
           </a:p>
@@ -3637,7 +3637,7 @@
           <a:p>
             <a:fld id="{846CE7D5-CF57-46EF-B807-FDD0502418D4}" type="datetimeFigureOut">
               <a:rPr lang="en-US" smtClean="0"/>
-              <a:t>1/6/2026</a:t>
+              <a:t>5/20/2026</a:t>
             </a:fld>
             <a:endParaRPr lang="en-US"/>
           </a:p>
@@ -3807,7 +3807,7 @@
           <a:p>
             <a:fld id="{846CE7D5-CF57-46EF-B807-FDD0502418D4}" type="datetimeFigureOut">
               <a:rPr lang="en-US" smtClean="0"/>
-              <a:t>1/6/2026</a:t>
+              <a:t>5/20/2026</a:t>
             </a:fld>
             <a:endParaRPr lang="en-US"/>
           </a:p>
@@ -4053,7 +4053,7 @@
           <a:p>
             <a:fld id="{846CE7D5-CF57-46EF-B807-FDD0502418D4}" type="datetimeFigureOut">
               <a:rPr lang="en-US" smtClean="0"/>
-              <a:t>1/6/2026</a:t>
+              <a:t>5/20/2026</a:t>
             </a:fld>
             <a:endParaRPr lang="en-US"/>
           </a:p>
@@ -4285,7 +4285,7 @@
           <a:p>
             <a:fld id="{846CE7D5-CF57-46EF-B807-FDD0502418D4}" type="datetimeFigureOut">
               <a:rPr lang="en-US" smtClean="0"/>
-              <a:t>1/6/2026</a:t>
+              <a:t>5/20/2026</a:t>
             </a:fld>
             <a:endParaRPr lang="en-US"/>
           </a:p>
@@ -4652,7 +4652,7 @@
           <a:p>
             <a:fld id="{846CE7D5-CF57-46EF-B807-FDD0502418D4}" type="datetimeFigureOut">
               <a:rPr lang="en-US" smtClean="0"/>
-              <a:t>1/6/2026</a:t>
+              <a:t>5/20/2026</a:t>
             </a:fld>
             <a:endParaRPr lang="en-US"/>
           </a:p>
@@ -4770,7 +4770,7 @@
           <a:p>
             <a:fld id="{846CE7D5-CF57-46EF-B807-FDD0502418D4}" type="datetimeFigureOut">
               <a:rPr lang="en-US" smtClean="0"/>
-              <a:t>1/6/2026</a:t>
+              <a:t>5/20/2026</a:t>
             </a:fld>
             <a:endParaRPr lang="en-US"/>
           </a:p>
@@ -4865,7 +4865,7 @@
           <a:p>
             <a:fld id="{846CE7D5-CF57-46EF-B807-FDD0502418D4}" type="datetimeFigureOut">
               <a:rPr lang="en-US" smtClean="0"/>
-              <a:t>1/6/2026</a:t>
+              <a:t>5/20/2026</a:t>
             </a:fld>
             <a:endParaRPr lang="en-US"/>
           </a:p>
@@ -5142,7 +5142,7 @@
           <a:p>
             <a:fld id="{846CE7D5-CF57-46EF-B807-FDD0502418D4}" type="datetimeFigureOut">
               <a:rPr lang="en-US" smtClean="0"/>
-              <a:t>1/6/2026</a:t>
+              <a:t>5/20/2026</a:t>
             </a:fld>
             <a:endParaRPr lang="en-US"/>
           </a:p>
@@ -5399,7 +5399,7 @@
           <a:p>
             <a:fld id="{846CE7D5-CF57-46EF-B807-FDD0502418D4}" type="datetimeFigureOut">
               <a:rPr lang="en-US" smtClean="0"/>
-              <a:t>1/6/2026</a:t>
+              <a:t>5/20/2026</a:t>
             </a:fld>
             <a:endParaRPr lang="en-US"/>
           </a:p>
@@ -5612,7 +5612,7 @@
           <a:p>
             <a:fld id="{846CE7D5-CF57-46EF-B807-FDD0502418D4}" type="datetimeFigureOut">
               <a:rPr lang="en-US" smtClean="0"/>
-              <a:t>1/6/2026</a:t>
+              <a:t>5/20/2026</a:t>
             </a:fld>
             <a:endParaRPr lang="en-US"/>
           </a:p>
@@ -7617,7 +7617,7 @@
             </a:r>
             <a:r>
               <a:rPr lang="en-US" sz="1400" dirty="0"/>
-              <a:t>="https://aframe.io/releases/1.4.1/aframe.min.js"&gt;&lt;/script&gt; </a:t>
+              <a:t>="https://aframe.io/releases/1.7.1/aframe.min.js"&gt;&lt;/script&gt; </a:t>
             </a:r>
           </a:p>
           <a:p>
@@ -9922,7 +9922,7 @@
         <p:spPr/>
         <p:txBody>
           <a:bodyPr>
-            <a:normAutofit lnSpcReduction="10000"/>
+            <a:normAutofit fontScale="92500" lnSpcReduction="20000"/>
           </a:bodyPr>
           <a:lstStyle/>
           <a:p>
@@ -10007,7 +10007,7 @@
                   <a:srgbClr val="FF0000"/>
                 </a:solidFill>
               </a:rPr>
-              <a:t>Or to run outside of Glitch.com to help TROUBLE SHOOTING</a:t>
+              <a:t>Or to run outside of header to help TROUBLE SHOOTING</a:t>
             </a:r>
           </a:p>
           <a:p>
@@ -10051,11 +10051,32 @@
                   </a:schemeClr>
                 </a:solidFill>
               </a:rPr>
-              <a:t>aframe.io_releases_1.7.1_aframe.min.js</a:t>
+              <a:t>aframe-master.min.js</a:t>
             </a:r>
             <a:r>
               <a:rPr lang="en-US" dirty="0"/>
-              <a:t>"&gt;</a:t>
+              <a:t>"&gt;  &lt;!-- OLD a-frame here --&gt;</a:t>
+            </a:r>
+          </a:p>
+          <a:p>
+            <a:pPr marL="0" indent="0">
+              <a:buNone/>
+            </a:pPr>
+            <a:r>
+              <a:rPr lang="en-US" dirty="0"/>
+              <a:t>						&lt;!-- NEW a-frame in </a:t>
+            </a:r>
+            <a:r>
+              <a:rPr lang="en-US" dirty="0">
+                <a:solidFill>
+                  <a:srgbClr val="FF0000"/>
+                </a:solidFill>
+              </a:rPr>
+              <a:t>head</a:t>
+            </a:r>
+            <a:r>
+              <a:rPr lang="en-US" dirty="0"/>
+              <a:t> --&gt;</a:t>
             </a:r>
           </a:p>
           <a:p>
@@ -10781,13 +10802,13 @@
           <p:nvPr/>
         </p:nvPicPr>
         <p:blipFill>
-          <a:blip r:embed="rId2">
+          <a:blip>
             <a:extLst>
               <a:ext uri="{28A0092B-C50C-407E-A947-70E740481C1C}">
                 <a14:useLocalDpi xmlns:a14="http://schemas.microsoft.com/office/drawing/2010/main" val="0"/>
               </a:ext>
               <a:ext uri="{96DAC541-7B7A-43D3-8B79-37D633B846F1}">
-                <asvg:svgBlip xmlns:asvg="http://schemas.microsoft.com/office/drawing/2016/SVG/main" r:embed="rId3"/>
+                <asvg:svgBlip xmlns:asvg="http://schemas.microsoft.com/office/drawing/2016/SVG/main" r:embed="rId2"/>
               </a:ext>
             </a:extLst>
           </a:blip>
@@ -11198,7 +11219,7 @@
             </a:pPr>
             <a:r>
               <a:rPr lang="en-US" dirty="0"/>
-              <a:t>	Goto </a:t>
+              <a:t>	Go to </a:t>
             </a:r>
             <a:r>
               <a:rPr lang="en-US" b="1" dirty="0">
@@ -11815,7 +11836,30 @@
                   <a:srgbClr val="0070C0"/>
                 </a:solidFill>
               </a:rPr>
-              <a:t>Term1&gt; python –m </a:t>
+              <a:t>Terminal&gt; code .</a:t>
+            </a:r>
+          </a:p>
+          <a:p>
+            <a:pPr marL="0" indent="0">
+              <a:buNone/>
+            </a:pPr>
+            <a:endParaRPr lang="en-US" b="1" dirty="0">
+              <a:solidFill>
+                <a:srgbClr val="0070C0"/>
+              </a:solidFill>
+            </a:endParaRPr>
+          </a:p>
+          <a:p>
+            <a:pPr marL="0" indent="0">
+              <a:buNone/>
+            </a:pPr>
+            <a:r>
+              <a:rPr lang="en-US" b="1" dirty="0">
+                <a:solidFill>
+                  <a:srgbClr val="0070C0"/>
+                </a:solidFill>
+              </a:rPr>
+              <a:t>Terminal&gt; python –m </a:t>
             </a:r>
             <a:r>
               <a:rPr lang="en-US" b="1" dirty="0" err="1">
@@ -11867,19 +11911,6 @@
                 <a:srgbClr val="0070C0"/>
               </a:solidFill>
             </a:endParaRPr>
-          </a:p>
-          <a:p>
-            <a:pPr marL="0" indent="0">
-              <a:buNone/>
-            </a:pPr>
-            <a:r>
-              <a:rPr lang="en-US" b="1" dirty="0">
-                <a:solidFill>
-                  <a:srgbClr val="0070C0"/>
-                </a:solidFill>
-              </a:rPr>
-              <a:t>Term2&gt; code .</a:t>
-            </a:r>
           </a:p>
           <a:p>
             <a:pPr marL="0" indent="0">
